--- a/docx/WheelMate.pptx
+++ b/docx/WheelMate.pptx
@@ -14,27 +14,25 @@
     <p:sldId id="262" r:id="rId12"/>
     <p:sldId id="263" r:id="rId13"/>
     <p:sldId id="264" r:id="rId14"/>
-    <p:sldId id="265" r:id="rId15"/>
-    <p:sldId id="266" r:id="rId16"/>
   </p:sldIdLst>
   <p:sldSz cx="18288000" cy="10287000"/>
   <p:notesSz cx="6858000" cy="9144000"/>
   <p:embeddedFontLst>
     <p:embeddedFont>
       <p:font typeface="DM Serif Display" charset="1" panose="00000000000000000000"/>
+      <p:regular r:id="rId15"/>
+    </p:embeddedFont>
+    <p:embeddedFont>
+      <p:font typeface="Open Sauce Bold" charset="1" panose="00000800000000000000"/>
+      <p:regular r:id="rId16"/>
+    </p:embeddedFont>
+    <p:embeddedFont>
+      <p:font typeface="Open Sauce" charset="1" panose="00000500000000000000"/>
       <p:regular r:id="rId17"/>
     </p:embeddedFont>
     <p:embeddedFont>
-      <p:font typeface="Open Sauce Bold" charset="1" panose="00000800000000000000"/>
+      <p:font typeface="Times New Roman MT Bold" charset="1" panose="02030802070405020303"/>
       <p:regular r:id="rId18"/>
-    </p:embeddedFont>
-    <p:embeddedFont>
-      <p:font typeface="Open Sauce" charset="1" panose="00000500000000000000"/>
-      <p:regular r:id="rId19"/>
-    </p:embeddedFont>
-    <p:embeddedFont>
-      <p:font typeface="Times New Roman MT Bold" charset="1" panose="02030802070405020303"/>
-      <p:regular r:id="rId20"/>
     </p:embeddedFont>
   </p:embeddedFontLst>
   <p:defaultTextStyle>
@@ -3204,7 +3202,7 @@
         </p:nvSpPr>
         <p:spPr>
           <a:xfrm flipH="false" flipV="false" rot="0">
-            <a:off x="11113134" y="5143500"/>
+            <a:off x="10266568" y="5278394"/>
             <a:ext cx="602401" cy="628054"/>
           </a:xfrm>
           <a:custGeom>
@@ -3219,10 +3217,10 @@
                   <a:pt x="0" y="0"/>
                 </a:moveTo>
                 <a:lnTo>
-                  <a:pt x="602400" y="0"/>
+                  <a:pt x="602401" y="0"/>
                 </a:lnTo>
                 <a:lnTo>
-                  <a:pt x="602400" y="628054"/>
+                  <a:pt x="602401" y="628054"/>
                 </a:lnTo>
                 <a:lnTo>
                   <a:pt x="0" y="628054"/>
@@ -3291,7 +3289,7 @@
         </p:nvSpPr>
         <p:spPr>
           <a:xfrm rot="0">
-            <a:off x="4180542" y="5280708"/>
+            <a:off x="3212711" y="5365662"/>
             <a:ext cx="9926917" cy="405892"/>
           </a:xfrm>
           <a:prstGeom prst="rect">
@@ -3363,442 +3361,6 @@
                 <a:sym typeface="DM Serif Display"/>
               </a:rPr>
               <a:t>legendss.team.2026@gmail.com</a:t>
-            </a:r>
-          </a:p>
-        </p:txBody>
-      </p:sp>
-    </p:spTree>
-  </p:cSld>
-  <p:clrMapOvr>
-    <a:masterClrMapping/>
-  </p:clrMapOvr>
-</p:sld>
-</file>
-
-<file path=ppt/slides/slide10.xml><?xml version="1.0" encoding="utf-8"?>
-<p:sld xmlns:p="http://schemas.openxmlformats.org/presentationml/2006/main" xmlns:a="http://schemas.openxmlformats.org/drawingml/2006/main" xmlns:r="http://schemas.openxmlformats.org/officeDocument/2006/relationships">
-  <p:cSld>
-    <p:spTree>
-      <p:nvGrpSpPr>
-        <p:cNvPr id="1" name=""/>
-        <p:cNvGrpSpPr/>
-        <p:nvPr/>
-      </p:nvGrpSpPr>
-      <p:grpSpPr>
-        <a:xfrm>
-          <a:off x="0" y="0"/>
-          <a:ext cx="0" cy="0"/>
-          <a:chOff x="0" y="0"/>
-          <a:chExt cx="0" cy="0"/>
-        </a:xfrm>
-      </p:grpSpPr>
-      <p:grpSp>
-        <p:nvGrpSpPr>
-          <p:cNvPr name="Group 2" id="2"/>
-          <p:cNvGrpSpPr/>
-          <p:nvPr/>
-        </p:nvGrpSpPr>
-        <p:grpSpPr>
-          <a:xfrm rot="0">
-            <a:off x="0" y="0"/>
-            <a:ext cx="18288000" cy="10287000"/>
-            <a:chOff x="0" y="0"/>
-            <a:chExt cx="24384000" cy="13716000"/>
-          </a:xfrm>
-        </p:grpSpPr>
-        <p:sp>
-          <p:nvSpPr>
-            <p:cNvPr name="Freeform 3" id="3"/>
-            <p:cNvSpPr/>
-            <p:nvPr/>
-          </p:nvSpPr>
-          <p:spPr>
-            <a:xfrm flipH="false" flipV="false" rot="0">
-              <a:off x="0" y="0"/>
-              <a:ext cx="24384000" cy="13716000"/>
-            </a:xfrm>
-            <a:custGeom>
-              <a:avLst/>
-              <a:gdLst/>
-              <a:ahLst/>
-              <a:cxnLst/>
-              <a:rect r="r" b="b" t="t" l="l"/>
-              <a:pathLst>
-                <a:path h="13716000" w="24384000">
-                  <a:moveTo>
-                    <a:pt x="0" y="0"/>
-                  </a:moveTo>
-                  <a:lnTo>
-                    <a:pt x="24384000" y="0"/>
-                  </a:lnTo>
-                  <a:lnTo>
-                    <a:pt x="24384000" y="13716000"/>
-                  </a:lnTo>
-                  <a:lnTo>
-                    <a:pt x="0" y="13716000"/>
-                  </a:lnTo>
-                  <a:lnTo>
-                    <a:pt x="0" y="0"/>
-                  </a:lnTo>
-                  <a:close/>
-                </a:path>
-              </a:pathLst>
-            </a:custGeom>
-            <a:blipFill>
-              <a:blip r:embed="rId2">
-                <a:alphaModFix amt="50000"/>
-              </a:blip>
-              <a:stretch>
-                <a:fillRect l="0" t="-27" r="0" b="-27"/>
-              </a:stretch>
-            </a:blipFill>
-          </p:spPr>
-        </p:sp>
-      </p:grpSp>
-      <p:grpSp>
-        <p:nvGrpSpPr>
-          <p:cNvPr name="Group 4" id="4"/>
-          <p:cNvGrpSpPr/>
-          <p:nvPr/>
-        </p:nvGrpSpPr>
-        <p:grpSpPr>
-          <a:xfrm rot="0">
-            <a:off x="1128303" y="990600"/>
-            <a:ext cx="2612460" cy="76200"/>
-            <a:chOff x="0" y="0"/>
-            <a:chExt cx="3483280" cy="101600"/>
-          </a:xfrm>
-        </p:grpSpPr>
-        <p:sp>
-          <p:nvSpPr>
-            <p:cNvPr name="Freeform 5" id="5"/>
-            <p:cNvSpPr/>
-            <p:nvPr/>
-          </p:nvSpPr>
-          <p:spPr>
-            <a:xfrm flipH="false" flipV="false" rot="0">
-              <a:off x="50800" y="0"/>
-              <a:ext cx="3381629" cy="101600"/>
-            </a:xfrm>
-            <a:custGeom>
-              <a:avLst/>
-              <a:gdLst/>
-              <a:ahLst/>
-              <a:cxnLst/>
-              <a:rect r="r" b="b" t="t" l="l"/>
-              <a:pathLst>
-                <a:path h="101600" w="3381629">
-                  <a:moveTo>
-                    <a:pt x="0" y="0"/>
-                  </a:moveTo>
-                  <a:lnTo>
-                    <a:pt x="3381629" y="0"/>
-                  </a:lnTo>
-                  <a:lnTo>
-                    <a:pt x="3381629" y="101600"/>
-                  </a:lnTo>
-                  <a:lnTo>
-                    <a:pt x="0" y="101600"/>
-                  </a:lnTo>
-                  <a:close/>
-                </a:path>
-              </a:pathLst>
-            </a:custGeom>
-            <a:solidFill>
-              <a:srgbClr val="000000"/>
-            </a:solidFill>
-          </p:spPr>
-        </p:sp>
-      </p:grpSp>
-      <p:grpSp>
-        <p:nvGrpSpPr>
-          <p:cNvPr name="Group 6" id="6"/>
-          <p:cNvGrpSpPr/>
-          <p:nvPr/>
-        </p:nvGrpSpPr>
-        <p:grpSpPr>
-          <a:xfrm rot="0">
-            <a:off x="5683367" y="0"/>
-            <a:ext cx="12604633" cy="10287000"/>
-            <a:chOff x="0" y="0"/>
-            <a:chExt cx="16806177" cy="13716000"/>
-          </a:xfrm>
-        </p:grpSpPr>
-        <p:sp>
-          <p:nvSpPr>
-            <p:cNvPr name="Freeform 7" id="7"/>
-            <p:cNvSpPr/>
-            <p:nvPr/>
-          </p:nvSpPr>
-          <p:spPr>
-            <a:xfrm flipH="false" flipV="false" rot="0">
-              <a:off x="0" y="0"/>
-              <a:ext cx="16806163" cy="13716000"/>
-            </a:xfrm>
-            <a:custGeom>
-              <a:avLst/>
-              <a:gdLst/>
-              <a:ahLst/>
-              <a:cxnLst/>
-              <a:rect r="r" b="b" t="t" l="l"/>
-              <a:pathLst>
-                <a:path h="13716000" w="16806163">
-                  <a:moveTo>
-                    <a:pt x="0" y="0"/>
-                  </a:moveTo>
-                  <a:lnTo>
-                    <a:pt x="16806163" y="0"/>
-                  </a:lnTo>
-                  <a:lnTo>
-                    <a:pt x="16806163" y="13716000"/>
-                  </a:lnTo>
-                  <a:lnTo>
-                    <a:pt x="0" y="13716000"/>
-                  </a:lnTo>
-                  <a:lnTo>
-                    <a:pt x="0" y="0"/>
-                  </a:lnTo>
-                  <a:close/>
-                </a:path>
-              </a:pathLst>
-            </a:custGeom>
-            <a:blipFill>
-              <a:blip r:embed="rId3"/>
-              <a:stretch>
-                <a:fillRect l="0" t="-41897" r="0" b="-41897"/>
-              </a:stretch>
-            </a:blipFill>
-          </p:spPr>
-        </p:sp>
-      </p:grpSp>
-      <p:sp>
-        <p:nvSpPr>
-          <p:cNvPr name="TextBox 8" id="8"/>
-          <p:cNvSpPr txBox="true"/>
-          <p:nvPr/>
-        </p:nvSpPr>
-        <p:spPr>
-          <a:xfrm rot="0">
-            <a:off x="1166403" y="1119521"/>
-            <a:ext cx="3822792" cy="2332987"/>
-          </a:xfrm>
-          <a:prstGeom prst="rect">
-            <a:avLst/>
-          </a:prstGeom>
-        </p:spPr>
-        <p:txBody>
-          <a:bodyPr anchor="t" rtlCol="false" tIns="0" lIns="0" bIns="0" rIns="0">
-            <a:spAutoFit/>
-          </a:bodyPr>
-          <a:lstStyle/>
-          <a:p>
-            <a:pPr algn="l">
-              <a:lnSpc>
-                <a:spcPts val="8958"/>
-              </a:lnSpc>
-            </a:pPr>
-            <a:r>
-              <a:rPr lang="en-US" sz="6398">
-                <a:solidFill>
-                  <a:srgbClr val="000000"/>
-                </a:solidFill>
-                <a:latin typeface="DM Serif Display"/>
-                <a:ea typeface="DM Serif Display"/>
-                <a:cs typeface="DM Serif Display"/>
-                <a:sym typeface="DM Serif Display"/>
-              </a:rPr>
-              <a:t>Вашите</a:t>
-            </a:r>
-          </a:p>
-          <a:p>
-            <a:pPr algn="l">
-              <a:lnSpc>
-                <a:spcPts val="8958"/>
-              </a:lnSpc>
-            </a:pPr>
-            <a:r>
-              <a:rPr lang="en-US" sz="6398">
-                <a:solidFill>
-                  <a:srgbClr val="000000"/>
-                </a:solidFill>
-                <a:latin typeface="DM Serif Display"/>
-                <a:ea typeface="DM Serif Display"/>
-                <a:cs typeface="DM Serif Display"/>
-                <a:sym typeface="DM Serif Display"/>
-              </a:rPr>
-              <a:t>Въпроси</a:t>
-            </a:r>
-          </a:p>
-        </p:txBody>
-      </p:sp>
-      <p:sp>
-        <p:nvSpPr>
-          <p:cNvPr name="TextBox 9" id="9"/>
-          <p:cNvSpPr txBox="true"/>
-          <p:nvPr/>
-        </p:nvSpPr>
-        <p:spPr>
-          <a:xfrm rot="0">
-            <a:off x="1538707" y="9182100"/>
-            <a:ext cx="3450479" cy="311782"/>
-          </a:xfrm>
-          <a:prstGeom prst="rect">
-            <a:avLst/>
-          </a:prstGeom>
-        </p:spPr>
-        <p:txBody>
-          <a:bodyPr anchor="t" rtlCol="false" tIns="0" lIns="0" bIns="0" rIns="0">
-            <a:spAutoFit/>
-          </a:bodyPr>
-          <a:lstStyle/>
-          <a:p>
-            <a:pPr algn="r">
-              <a:lnSpc>
-                <a:spcPts val="2238"/>
-              </a:lnSpc>
-            </a:pPr>
-            <a:r>
-              <a:rPr lang="en-US" sz="1599" spc="159">
-                <a:solidFill>
-                  <a:srgbClr val="000000">
-                    <a:alpha val="49412"/>
-                  </a:srgbClr>
-                </a:solidFill>
-                <a:latin typeface="Open Sauce"/>
-                <a:ea typeface="Open Sauce"/>
-                <a:cs typeface="Open Sauce"/>
-                <a:sym typeface="Open Sauce"/>
-              </a:rPr>
-              <a:t>10</a:t>
-            </a:r>
-          </a:p>
-        </p:txBody>
-      </p:sp>
-    </p:spTree>
-  </p:cSld>
-  <p:clrMapOvr>
-    <a:masterClrMapping/>
-  </p:clrMapOvr>
-</p:sld>
-</file>
-
-<file path=ppt/slides/slide11.xml><?xml version="1.0" encoding="utf-8"?>
-<p:sld xmlns:p="http://schemas.openxmlformats.org/presentationml/2006/main" xmlns:a="http://schemas.openxmlformats.org/drawingml/2006/main" xmlns:r="http://schemas.openxmlformats.org/officeDocument/2006/relationships">
-  <p:cSld>
-    <p:spTree>
-      <p:nvGrpSpPr>
-        <p:cNvPr id="1" name=""/>
-        <p:cNvGrpSpPr/>
-        <p:nvPr/>
-      </p:nvGrpSpPr>
-      <p:grpSpPr>
-        <a:xfrm>
-          <a:off x="0" y="0"/>
-          <a:ext cx="0" cy="0"/>
-          <a:chOff x="0" y="0"/>
-          <a:chExt cx="0" cy="0"/>
-        </a:xfrm>
-      </p:grpSpPr>
-      <p:grpSp>
-        <p:nvGrpSpPr>
-          <p:cNvPr name="Group 2" id="2"/>
-          <p:cNvGrpSpPr/>
-          <p:nvPr/>
-        </p:nvGrpSpPr>
-        <p:grpSpPr>
-          <a:xfrm rot="0">
-            <a:off x="0" y="0"/>
-            <a:ext cx="18288000" cy="10287000"/>
-            <a:chOff x="0" y="0"/>
-            <a:chExt cx="24384000" cy="13716000"/>
-          </a:xfrm>
-        </p:grpSpPr>
-        <p:sp>
-          <p:nvSpPr>
-            <p:cNvPr name="Freeform 3" id="3"/>
-            <p:cNvSpPr/>
-            <p:nvPr/>
-          </p:nvSpPr>
-          <p:spPr>
-            <a:xfrm flipH="false" flipV="false" rot="0">
-              <a:off x="0" y="0"/>
-              <a:ext cx="24384000" cy="13716000"/>
-            </a:xfrm>
-            <a:custGeom>
-              <a:avLst/>
-              <a:gdLst/>
-              <a:ahLst/>
-              <a:cxnLst/>
-              <a:rect r="r" b="b" t="t" l="l"/>
-              <a:pathLst>
-                <a:path h="13716000" w="24384000">
-                  <a:moveTo>
-                    <a:pt x="0" y="0"/>
-                  </a:moveTo>
-                  <a:lnTo>
-                    <a:pt x="24384000" y="0"/>
-                  </a:lnTo>
-                  <a:lnTo>
-                    <a:pt x="24384000" y="13716000"/>
-                  </a:lnTo>
-                  <a:lnTo>
-                    <a:pt x="0" y="13716000"/>
-                  </a:lnTo>
-                  <a:lnTo>
-                    <a:pt x="0" y="0"/>
-                  </a:lnTo>
-                  <a:close/>
-                </a:path>
-              </a:pathLst>
-            </a:custGeom>
-            <a:blipFill>
-              <a:blip r:embed="rId2">
-                <a:alphaModFix amt="50000"/>
-              </a:blip>
-              <a:stretch>
-                <a:fillRect l="0" t="-12" r="0" b="-12"/>
-              </a:stretch>
-            </a:blipFill>
-          </p:spPr>
-        </p:sp>
-      </p:grpSp>
-      <p:sp>
-        <p:nvSpPr>
-          <p:cNvPr name="TextBox 4" id="4"/>
-          <p:cNvSpPr txBox="true"/>
-          <p:nvPr/>
-        </p:nvSpPr>
-        <p:spPr>
-          <a:xfrm rot="0">
-            <a:off x="1732102" y="2181729"/>
-            <a:ext cx="14823796" cy="4784718"/>
-          </a:xfrm>
-          <a:prstGeom prst="rect">
-            <a:avLst/>
-          </a:prstGeom>
-        </p:spPr>
-        <p:txBody>
-          <a:bodyPr anchor="t" rtlCol="false" tIns="0" lIns="0" bIns="0" rIns="0">
-            <a:spAutoFit/>
-          </a:bodyPr>
-          <a:lstStyle/>
-          <a:p>
-            <a:pPr algn="ctr">
-              <a:lnSpc>
-                <a:spcPts val="18200"/>
-              </a:lnSpc>
-            </a:pPr>
-            <a:r>
-              <a:rPr lang="en-US" sz="13000" b="true">
-                <a:solidFill>
-                  <a:srgbClr val="004AAD"/>
-                </a:solidFill>
-                <a:latin typeface="Times New Roman MT Bold"/>
-                <a:ea typeface="Times New Roman MT Bold"/>
-                <a:cs typeface="Times New Roman MT Bold"/>
-                <a:sym typeface="Times New Roman MT Bold"/>
-              </a:rPr>
-              <a:t>Благодарим ви за вниманието</a:t>
             </a:r>
           </a:p>
         </p:txBody>
@@ -4565,7 +4127,7 @@
         <p:spPr>
           <a:xfrm rot="0">
             <a:off x="13839249" y="4390390"/>
-            <a:ext cx="3588172" cy="459105"/>
+            <a:ext cx="3588172" cy="944880"/>
           </a:xfrm>
           <a:prstGeom prst="rect">
             <a:avLst/>
@@ -4593,6 +4155,25 @@
                 <a:sym typeface="Open Sauce Bold"/>
               </a:rPr>
               <a:t>Backend</a:t>
+            </a:r>
+          </a:p>
+          <a:p>
+            <a:pPr algn="l">
+              <a:lnSpc>
+                <a:spcPts val="3839"/>
+              </a:lnSpc>
+            </a:pPr>
+            <a:r>
+              <a:rPr lang="en-US" sz="2399" b="true">
+                <a:solidFill>
+                  <a:srgbClr val="004AAD"/>
+                </a:solidFill>
+                <a:latin typeface="Open Sauce Bold"/>
+                <a:ea typeface="Open Sauce Bold"/>
+                <a:cs typeface="Open Sauce Bold"/>
+                <a:sym typeface="Open Sauce Bold"/>
+              </a:rPr>
+              <a:t>Hardware</a:t>
             </a:r>
           </a:p>
         </p:txBody>
@@ -5402,7 +4983,7 @@
         <p:spPr>
           <a:xfrm rot="0">
             <a:off x="377120" y="1883172"/>
-            <a:ext cx="17556615" cy="7037363"/>
+            <a:ext cx="17556615" cy="8123213"/>
           </a:xfrm>
           <a:prstGeom prst="rect">
             <a:avLst/>
@@ -5425,22 +5006,32 @@
               <a:buChar char="•"/>
             </a:pPr>
             <a:r>
-              <a:rPr lang="en-US" sz="3059" spc="304">
+              <a:rPr lang="en-US" b="true" sz="3059" spc="304">
                 <a:solidFill>
                   <a:srgbClr val="000000"/>
                 </a:solidFill>
-                <a:latin typeface="Open Sauce"/>
-                <a:ea typeface="Open Sauce"/>
-                <a:cs typeface="Open Sauce"/>
-                <a:sym typeface="Open Sauce"/>
+                <a:latin typeface="Open Sauce Bold"/>
+                <a:ea typeface="Open Sauce Bold"/>
+                <a:cs typeface="Open Sauce Bold"/>
+                <a:sym typeface="Open Sauce Bold"/>
               </a:rPr>
-              <a:t>Модулна платформа за интелигентна инвалидна количка</a:t>
-            </a:r>
+              <a:t>Всеки slave модул работи независимо и може да се закупува отделно</a:t>
+            </a:r>
+          </a:p>
+          <a:p>
+            <a:pPr algn="l">
+              <a:lnSpc>
+                <a:spcPts val="4283"/>
+              </a:lnSpc>
+              <a:spcBef>
+                <a:spcPct val="0"/>
+              </a:spcBef>
+            </a:pPr>
           </a:p>
           <a:p>
             <a:pPr algn="l" marL="660573" indent="-330287" lvl="1">
               <a:lnSpc>
-                <a:spcPts val="4284"/>
+                <a:spcPts val="4283"/>
               </a:lnSpc>
               <a:spcBef>
                 <a:spcPct val="0"/>
@@ -5449,22 +5040,32 @@
               <a:buChar char="•"/>
             </a:pPr>
             <a:r>
-              <a:rPr lang="en-US" sz="3059" spc="304">
+              <a:rPr lang="en-US" b="true" sz="3059" spc="302">
                 <a:solidFill>
                   <a:srgbClr val="000000"/>
                 </a:solidFill>
-                <a:latin typeface="Open Sauce"/>
-                <a:ea typeface="Open Sauce"/>
-                <a:cs typeface="Open Sauce"/>
-                <a:sym typeface="Open Sauce"/>
+                <a:latin typeface="Open Sauce Bold"/>
+                <a:ea typeface="Open Sauce Bold"/>
+                <a:cs typeface="Open Sauce Bold"/>
+                <a:sym typeface="Open Sauce Bold"/>
               </a:rPr>
-              <a:t>Всеки slave модул работи независимо и може да се закупува отделно</a:t>
-            </a:r>
+              <a:t>Модулната структура позволява лесно прикрепяне към почти всяка количка</a:t>
+            </a:r>
+          </a:p>
+          <a:p>
+            <a:pPr algn="l">
+              <a:lnSpc>
+                <a:spcPts val="4284"/>
+              </a:lnSpc>
+              <a:spcBef>
+                <a:spcPct val="0"/>
+              </a:spcBef>
+            </a:pPr>
           </a:p>
           <a:p>
             <a:pPr algn="l" marL="660573" indent="-330287" lvl="1">
               <a:lnSpc>
-                <a:spcPts val="4284"/>
+                <a:spcPts val="4283"/>
               </a:lnSpc>
               <a:spcBef>
                 <a:spcPct val="0"/>
@@ -5473,22 +5074,32 @@
               <a:buChar char="•"/>
             </a:pPr>
             <a:r>
-              <a:rPr lang="en-US" sz="3059" spc="304">
+              <a:rPr lang="en-US" b="true" sz="3059" spc="302">
                 <a:solidFill>
                   <a:srgbClr val="000000"/>
                 </a:solidFill>
-                <a:latin typeface="Open Sauce"/>
-                <a:ea typeface="Open Sauce"/>
-                <a:cs typeface="Open Sauce"/>
-                <a:sym typeface="Open Sauce"/>
+                <a:latin typeface="Open Sauce Bold"/>
+                <a:ea typeface="Open Sauce Bold"/>
+                <a:cs typeface="Open Sauce Bold"/>
+                <a:sym typeface="Open Sauce Bold"/>
               </a:rPr>
-              <a:t>Master модулът (ESP32) се свързва към тях и управлява комуникацията</a:t>
-            </a:r>
+              <a:t>Мобилна апликация за проследяване на локация и активност от гледачи близки</a:t>
+            </a:r>
+          </a:p>
+          <a:p>
+            <a:pPr algn="l">
+              <a:lnSpc>
+                <a:spcPts val="4284"/>
+              </a:lnSpc>
+              <a:spcBef>
+                <a:spcPct val="0"/>
+              </a:spcBef>
+            </a:pPr>
           </a:p>
           <a:p>
             <a:pPr algn="l" marL="660573" indent="-330287" lvl="1">
               <a:lnSpc>
-                <a:spcPts val="4284"/>
+                <a:spcPts val="4283"/>
               </a:lnSpc>
               <a:spcBef>
                 <a:spcPct val="0"/>
@@ -5497,22 +5108,32 @@
               <a:buChar char="•"/>
             </a:pPr>
             <a:r>
-              <a:rPr lang="en-US" sz="3059" spc="304">
+              <a:rPr lang="en-US" b="true" sz="3059" spc="302">
                 <a:solidFill>
                   <a:srgbClr val="000000"/>
                 </a:solidFill>
-                <a:latin typeface="Open Sauce"/>
-                <a:ea typeface="Open Sauce"/>
-                <a:cs typeface="Open Sauce"/>
-                <a:sym typeface="Open Sauce"/>
+                <a:latin typeface="Open Sauce Bold"/>
+                <a:ea typeface="Open Sauce Bold"/>
+                <a:cs typeface="Open Sauce Bold"/>
+                <a:sym typeface="Open Sauce Bold"/>
               </a:rPr>
-              <a:t>Модулната структура позволява лесно прикрепяне към почти всяка количка</a:t>
-            </a:r>
+              <a:t>Надеждна SOS система за сигнализация при нужда от помощ</a:t>
+            </a:r>
+          </a:p>
+          <a:p>
+            <a:pPr algn="l">
+              <a:lnSpc>
+                <a:spcPts val="4283"/>
+              </a:lnSpc>
+              <a:spcBef>
+                <a:spcPct val="0"/>
+              </a:spcBef>
+            </a:pPr>
           </a:p>
           <a:p>
             <a:pPr algn="l" marL="660573" indent="-330287" lvl="1">
               <a:lnSpc>
-                <a:spcPts val="4284"/>
+                <a:spcPts val="4283"/>
               </a:lnSpc>
               <a:spcBef>
                 <a:spcPct val="0"/>
@@ -5521,113 +5142,37 @@
               <a:buChar char="•"/>
             </a:pPr>
             <a:r>
-              <a:rPr lang="en-US" sz="3059" spc="304">
+              <a:rPr lang="en-US" b="true" sz="3059" spc="302">
                 <a:solidFill>
                   <a:srgbClr val="000000"/>
                 </a:solidFill>
-                <a:latin typeface="Open Sauce"/>
-                <a:ea typeface="Open Sauce"/>
-                <a:cs typeface="Open Sauce"/>
-                <a:sym typeface="Open Sauce"/>
+                <a:latin typeface="Open Sauce Bold"/>
+                <a:ea typeface="Open Sauce Bold"/>
+                <a:cs typeface="Open Sauce Bold"/>
+                <a:sym typeface="Open Sauce Bold"/>
               </a:rPr>
-              <a:t>Мобилна апликация за проследяване на локация и активност от гледачи и доброволци</a:t>
-            </a:r>
-          </a:p>
-          <a:p>
-            <a:pPr algn="l" marL="660573" indent="-330287" lvl="1">
+              <a:t>Вграден навигационен модул стриймва инструкции от апликацията към дисплей</a:t>
+            </a:r>
+          </a:p>
+          <a:p>
+            <a:pPr algn="l">
               <a:lnSpc>
                 <a:spcPts val="4284"/>
               </a:lnSpc>
               <a:spcBef>
                 <a:spcPct val="0"/>
               </a:spcBef>
-              <a:buFont typeface="Arial"/>
-              <a:buChar char="•"/>
             </a:pPr>
-            <a:r>
-              <a:rPr lang="en-US" sz="3059" spc="304">
-                <a:solidFill>
-                  <a:srgbClr val="000000"/>
-                </a:solidFill>
-                <a:latin typeface="Open Sauce"/>
-                <a:ea typeface="Open Sauce"/>
-                <a:cs typeface="Open Sauce"/>
-                <a:sym typeface="Open Sauce"/>
-              </a:rPr>
-              <a:t>Надеждна система за сигнализация при помощ</a:t>
-            </a:r>
-          </a:p>
-          <a:p>
-            <a:pPr algn="l" marL="660573" indent="-330287" lvl="1">
+          </a:p>
+          <a:p>
+            <a:pPr algn="l">
               <a:lnSpc>
                 <a:spcPts val="4284"/>
               </a:lnSpc>
               <a:spcBef>
                 <a:spcPct val="0"/>
               </a:spcBef>
-              <a:buFont typeface="Arial"/>
-              <a:buChar char="•"/>
             </a:pPr>
-            <a:r>
-              <a:rPr lang="en-US" sz="3059" spc="304">
-                <a:solidFill>
-                  <a:srgbClr val="000000"/>
-                </a:solidFill>
-                <a:latin typeface="Open Sauce"/>
-                <a:ea typeface="Open Sauce"/>
-                <a:cs typeface="Open Sauce"/>
-                <a:sym typeface="Open Sauce"/>
-              </a:rPr>
-              <a:t>Активиране чрез паник бутон, прекомерен наклон или необичайни G-сили</a:t>
-            </a:r>
-          </a:p>
-          <a:p>
-            <a:pPr algn="l" marL="660573" indent="-330287" lvl="1">
-              <a:lnSpc>
-                <a:spcPts val="4284"/>
-              </a:lnSpc>
-              <a:spcBef>
-                <a:spcPct val="0"/>
-              </a:spcBef>
-              <a:buFont typeface="Arial"/>
-              <a:buChar char="•"/>
-            </a:pPr>
-            <a:r>
-              <a:rPr lang="en-US" sz="3059" spc="304">
-                <a:solidFill>
-                  <a:srgbClr val="000000"/>
-                </a:solidFill>
-                <a:latin typeface="Open Sauce"/>
-                <a:ea typeface="Open Sauce"/>
-                <a:cs typeface="Open Sauce"/>
-                <a:sym typeface="Open Sauce"/>
-              </a:rPr>
-              <a:t>Вграден навигационен модул стриймва инструкции от апликацията към дисплей</a:t>
-            </a:r>
-          </a:p>
-          <a:p>
-            <a:pPr algn="l" marL="660573" indent="-330287" lvl="1">
-              <a:lnSpc>
-                <a:spcPts val="4284"/>
-              </a:lnSpc>
-              <a:spcBef>
-                <a:spcPct val="0"/>
-              </a:spcBef>
-              <a:buFont typeface="Arial"/>
-              <a:buChar char="•"/>
-            </a:pPr>
-            <a:r>
-              <a:rPr lang="en-US" sz="3059" spc="304">
-                <a:solidFill>
-                  <a:srgbClr val="000000"/>
-                </a:solidFill>
-                <a:latin typeface="Open Sauce"/>
-                <a:ea typeface="Open Sauce"/>
-                <a:cs typeface="Open Sauce"/>
-                <a:sym typeface="Open Sauce"/>
-              </a:rPr>
-              <a:t>Hands-free ориентация, подходяща за ръчно задвижени колички</a:t>
-            </a:r>
           </a:p>
         </p:txBody>
       </p:sp>
@@ -6921,7 +6466,7 @@
         </p:nvSpPr>
         <p:spPr>
           <a:xfrm rot="0">
-            <a:off x="490812" y="3062522"/>
+            <a:off x="490812" y="2654114"/>
             <a:ext cx="9542242" cy="1577974"/>
           </a:xfrm>
           <a:prstGeom prst="rect">
@@ -6967,7 +6512,7 @@
         </p:nvSpPr>
         <p:spPr>
           <a:xfrm rot="0">
-            <a:off x="490812" y="5173744"/>
+            <a:off x="566619" y="4465720"/>
             <a:ext cx="9542242" cy="1577974"/>
           </a:xfrm>
           <a:prstGeom prst="rect">
@@ -7013,7 +6558,7 @@
         </p:nvSpPr>
         <p:spPr>
           <a:xfrm rot="0">
-            <a:off x="490812" y="6929719"/>
+            <a:off x="490812" y="6555440"/>
             <a:ext cx="9693857" cy="2387599"/>
           </a:xfrm>
           <a:prstGeom prst="rect">
@@ -7778,7 +7323,7 @@
         </p:nvGrpSpPr>
         <p:grpSpPr>
           <a:xfrm rot="0">
-            <a:off x="8112365" y="1451054"/>
+            <a:off x="8114690" y="1458693"/>
             <a:ext cx="2813056" cy="2813056"/>
             <a:chOff x="0" y="0"/>
             <a:chExt cx="3750742" cy="3750742"/>
@@ -8366,904 +7911,6 @@
 </file>
 
 <file path=ppt/slides/slide7.xml><?xml version="1.0" encoding="utf-8"?>
-<p:sld xmlns:p="http://schemas.openxmlformats.org/presentationml/2006/main" xmlns:a="http://schemas.openxmlformats.org/drawingml/2006/main" xmlns:r="http://schemas.openxmlformats.org/officeDocument/2006/relationships">
-  <p:cSld>
-    <p:spTree>
-      <p:nvGrpSpPr>
-        <p:cNvPr id="1" name=""/>
-        <p:cNvGrpSpPr/>
-        <p:nvPr/>
-      </p:nvGrpSpPr>
-      <p:grpSpPr>
-        <a:xfrm>
-          <a:off x="0" y="0"/>
-          <a:ext cx="0" cy="0"/>
-          <a:chOff x="0" y="0"/>
-          <a:chExt cx="0" cy="0"/>
-        </a:xfrm>
-      </p:grpSpPr>
-      <p:grpSp>
-        <p:nvGrpSpPr>
-          <p:cNvPr name="Group 2" id="2"/>
-          <p:cNvGrpSpPr/>
-          <p:nvPr/>
-        </p:nvGrpSpPr>
-        <p:grpSpPr>
-          <a:xfrm rot="0">
-            <a:off x="0" y="0"/>
-            <a:ext cx="18288000" cy="10287000"/>
-            <a:chOff x="0" y="0"/>
-            <a:chExt cx="24384000" cy="13716000"/>
-          </a:xfrm>
-        </p:grpSpPr>
-        <p:sp>
-          <p:nvSpPr>
-            <p:cNvPr name="Freeform 3" id="3"/>
-            <p:cNvSpPr/>
-            <p:nvPr/>
-          </p:nvSpPr>
-          <p:spPr>
-            <a:xfrm flipH="false" flipV="false" rot="0">
-              <a:off x="0" y="0"/>
-              <a:ext cx="24384000" cy="13716000"/>
-            </a:xfrm>
-            <a:custGeom>
-              <a:avLst/>
-              <a:gdLst/>
-              <a:ahLst/>
-              <a:cxnLst/>
-              <a:rect r="r" b="b" t="t" l="l"/>
-              <a:pathLst>
-                <a:path h="13716000" w="24384000">
-                  <a:moveTo>
-                    <a:pt x="0" y="0"/>
-                  </a:moveTo>
-                  <a:lnTo>
-                    <a:pt x="24384000" y="0"/>
-                  </a:lnTo>
-                  <a:lnTo>
-                    <a:pt x="24384000" y="13716000"/>
-                  </a:lnTo>
-                  <a:lnTo>
-                    <a:pt x="0" y="13716000"/>
-                  </a:lnTo>
-                  <a:lnTo>
-                    <a:pt x="0" y="0"/>
-                  </a:lnTo>
-                  <a:close/>
-                </a:path>
-              </a:pathLst>
-            </a:custGeom>
-            <a:blipFill>
-              <a:blip r:embed="rId2">
-                <a:alphaModFix amt="50000"/>
-              </a:blip>
-              <a:stretch>
-                <a:fillRect l="0" t="-27" r="0" b="-27"/>
-              </a:stretch>
-            </a:blipFill>
-          </p:spPr>
-        </p:sp>
-      </p:grpSp>
-      <p:grpSp>
-        <p:nvGrpSpPr>
-          <p:cNvPr name="Group 4" id="4"/>
-          <p:cNvGrpSpPr/>
-          <p:nvPr/>
-        </p:nvGrpSpPr>
-        <p:grpSpPr>
-          <a:xfrm rot="0">
-            <a:off x="763364" y="674152"/>
-            <a:ext cx="2711077" cy="87848"/>
-            <a:chOff x="0" y="0"/>
-            <a:chExt cx="3135490" cy="101600"/>
-          </a:xfrm>
-        </p:grpSpPr>
-        <p:sp>
-          <p:nvSpPr>
-            <p:cNvPr name="Freeform 5" id="5"/>
-            <p:cNvSpPr/>
-            <p:nvPr/>
-          </p:nvSpPr>
-          <p:spPr>
-            <a:xfrm flipH="false" flipV="false" rot="0">
-              <a:off x="50800" y="0"/>
-              <a:ext cx="3033903" cy="101600"/>
-            </a:xfrm>
-            <a:custGeom>
-              <a:avLst/>
-              <a:gdLst/>
-              <a:ahLst/>
-              <a:cxnLst/>
-              <a:rect r="r" b="b" t="t" l="l"/>
-              <a:pathLst>
-                <a:path h="101600" w="3033903">
-                  <a:moveTo>
-                    <a:pt x="0" y="0"/>
-                  </a:moveTo>
-                  <a:lnTo>
-                    <a:pt x="3033903" y="0"/>
-                  </a:lnTo>
-                  <a:lnTo>
-                    <a:pt x="3033903" y="101600"/>
-                  </a:lnTo>
-                  <a:lnTo>
-                    <a:pt x="0" y="101600"/>
-                  </a:lnTo>
-                  <a:close/>
-                </a:path>
-              </a:pathLst>
-            </a:custGeom>
-            <a:solidFill>
-              <a:srgbClr val="000000"/>
-            </a:solidFill>
-          </p:spPr>
-        </p:sp>
-      </p:grpSp>
-      <p:sp>
-        <p:nvSpPr>
-          <p:cNvPr name="TextBox 6" id="6"/>
-          <p:cNvSpPr txBox="true"/>
-          <p:nvPr/>
-        </p:nvSpPr>
-        <p:spPr>
-          <a:xfrm rot="0">
-            <a:off x="719078" y="914400"/>
-            <a:ext cx="10399166" cy="1199512"/>
-          </a:xfrm>
-          <a:prstGeom prst="rect">
-            <a:avLst/>
-          </a:prstGeom>
-        </p:spPr>
-        <p:txBody>
-          <a:bodyPr anchor="t" rtlCol="false" tIns="0" lIns="0" bIns="0" rIns="0">
-            <a:spAutoFit/>
-          </a:bodyPr>
-          <a:lstStyle/>
-          <a:p>
-            <a:pPr algn="l">
-              <a:lnSpc>
-                <a:spcPts val="8958"/>
-              </a:lnSpc>
-            </a:pPr>
-            <a:r>
-              <a:rPr lang="en-US" sz="6398">
-                <a:solidFill>
-                  <a:srgbClr val="000000"/>
-                </a:solidFill>
-                <a:latin typeface="DM Serif Display"/>
-                <a:ea typeface="DM Serif Display"/>
-                <a:cs typeface="DM Serif Display"/>
-                <a:sym typeface="DM Serif Display"/>
-              </a:rPr>
-              <a:t>Roadmap</a:t>
-            </a:r>
-          </a:p>
-        </p:txBody>
-      </p:sp>
-      <p:sp>
-        <p:nvSpPr>
-          <p:cNvPr name="TextBox 7" id="7"/>
-          <p:cNvSpPr txBox="true"/>
-          <p:nvPr/>
-        </p:nvSpPr>
-        <p:spPr>
-          <a:xfrm rot="0">
-            <a:off x="13671128" y="9103995"/>
-            <a:ext cx="3450479" cy="311782"/>
-          </a:xfrm>
-          <a:prstGeom prst="rect">
-            <a:avLst/>
-          </a:prstGeom>
-        </p:spPr>
-        <p:txBody>
-          <a:bodyPr anchor="t" rtlCol="false" tIns="0" lIns="0" bIns="0" rIns="0">
-            <a:spAutoFit/>
-          </a:bodyPr>
-          <a:lstStyle/>
-          <a:p>
-            <a:pPr algn="r">
-              <a:lnSpc>
-                <a:spcPts val="2238"/>
-              </a:lnSpc>
-            </a:pPr>
-            <a:r>
-              <a:rPr lang="en-US" sz="1599" spc="159">
-                <a:solidFill>
-                  <a:srgbClr val="000000">
-                    <a:alpha val="49412"/>
-                  </a:srgbClr>
-                </a:solidFill>
-                <a:latin typeface="Open Sauce"/>
-                <a:ea typeface="Open Sauce"/>
-                <a:cs typeface="Open Sauce"/>
-                <a:sym typeface="Open Sauce"/>
-              </a:rPr>
-              <a:t>8</a:t>
-            </a:r>
-          </a:p>
-        </p:txBody>
-      </p:sp>
-      <p:sp>
-        <p:nvSpPr>
-          <p:cNvPr name="TextBox 8" id="8"/>
-          <p:cNvSpPr txBox="true"/>
-          <p:nvPr/>
-        </p:nvSpPr>
-        <p:spPr>
-          <a:xfrm rot="0">
-            <a:off x="2118903" y="2804655"/>
-            <a:ext cx="3440954" cy="608965"/>
-          </a:xfrm>
-          <a:prstGeom prst="rect">
-            <a:avLst/>
-          </a:prstGeom>
-        </p:spPr>
-        <p:txBody>
-          <a:bodyPr anchor="t" rtlCol="false" tIns="0" lIns="0" bIns="0" rIns="0">
-            <a:spAutoFit/>
-          </a:bodyPr>
-          <a:lstStyle/>
-          <a:p>
-            <a:pPr algn="l">
-              <a:lnSpc>
-                <a:spcPts val="5120"/>
-              </a:lnSpc>
-            </a:pPr>
-            <a:r>
-              <a:rPr lang="en-US" sz="3200" b="true">
-                <a:solidFill>
-                  <a:srgbClr val="000000"/>
-                </a:solidFill>
-                <a:latin typeface="Open Sauce Bold"/>
-                <a:ea typeface="Open Sauce Bold"/>
-                <a:cs typeface="Open Sauce Bold"/>
-                <a:sym typeface="Open Sauce Bold"/>
-              </a:rPr>
-              <a:t>Brainstorming</a:t>
-            </a:r>
-          </a:p>
-        </p:txBody>
-      </p:sp>
-      <p:sp>
-        <p:nvSpPr>
-          <p:cNvPr name="TextBox 9" id="9"/>
-          <p:cNvSpPr txBox="true"/>
-          <p:nvPr/>
-        </p:nvSpPr>
-        <p:spPr>
-          <a:xfrm rot="0">
-            <a:off x="2118903" y="3583800"/>
-            <a:ext cx="3237205" cy="1430655"/>
-          </a:xfrm>
-          <a:prstGeom prst="rect">
-            <a:avLst/>
-          </a:prstGeom>
-        </p:spPr>
-        <p:txBody>
-          <a:bodyPr anchor="t" rtlCol="false" tIns="0" lIns="0" bIns="0" rIns="0">
-            <a:spAutoFit/>
-          </a:bodyPr>
-          <a:lstStyle/>
-          <a:p>
-            <a:pPr algn="l">
-              <a:lnSpc>
-                <a:spcPts val="3840"/>
-              </a:lnSpc>
-            </a:pPr>
-            <a:r>
-              <a:rPr lang="en-US" sz="2400">
-                <a:solidFill>
-                  <a:srgbClr val="000000"/>
-                </a:solidFill>
-                <a:latin typeface="Open Sauce"/>
-                <a:ea typeface="Open Sauce"/>
-                <a:cs typeface="Open Sauce"/>
-                <a:sym typeface="Open Sauce"/>
-              </a:rPr>
-              <a:t>Измисляне на идеи и споделянето им с отбора</a:t>
-            </a:r>
-          </a:p>
-        </p:txBody>
-      </p:sp>
-      <p:grpSp>
-        <p:nvGrpSpPr>
-          <p:cNvPr name="Group 10" id="10"/>
-          <p:cNvGrpSpPr/>
-          <p:nvPr/>
-        </p:nvGrpSpPr>
-        <p:grpSpPr>
-          <a:xfrm rot="0">
-            <a:off x="1156878" y="5695950"/>
-            <a:ext cx="15974254" cy="38100"/>
-            <a:chOff x="0" y="0"/>
-            <a:chExt cx="21299005" cy="50800"/>
-          </a:xfrm>
-        </p:grpSpPr>
-        <p:sp>
-          <p:nvSpPr>
-            <p:cNvPr name="Freeform 11" id="11"/>
-            <p:cNvSpPr/>
-            <p:nvPr/>
-          </p:nvSpPr>
-          <p:spPr>
-            <a:xfrm flipH="false" flipV="false" rot="0">
-              <a:off x="25400" y="0"/>
-              <a:ext cx="21248243" cy="50800"/>
-            </a:xfrm>
-            <a:custGeom>
-              <a:avLst/>
-              <a:gdLst/>
-              <a:ahLst/>
-              <a:cxnLst/>
-              <a:rect r="r" b="b" t="t" l="l"/>
-              <a:pathLst>
-                <a:path h="50800" w="21248243">
-                  <a:moveTo>
-                    <a:pt x="0" y="0"/>
-                  </a:moveTo>
-                  <a:lnTo>
-                    <a:pt x="21248243" y="0"/>
-                  </a:lnTo>
-                  <a:lnTo>
-                    <a:pt x="21248243" y="50800"/>
-                  </a:lnTo>
-                  <a:lnTo>
-                    <a:pt x="0" y="50800"/>
-                  </a:lnTo>
-                  <a:close/>
-                </a:path>
-              </a:pathLst>
-            </a:custGeom>
-            <a:solidFill>
-              <a:srgbClr val="000000"/>
-            </a:solidFill>
-          </p:spPr>
-        </p:sp>
-      </p:grpSp>
-      <p:grpSp>
-        <p:nvGrpSpPr>
-          <p:cNvPr name="Group 12" id="12"/>
-          <p:cNvGrpSpPr/>
-          <p:nvPr/>
-        </p:nvGrpSpPr>
-        <p:grpSpPr>
-          <a:xfrm rot="0">
-            <a:off x="1728378" y="3766614"/>
-            <a:ext cx="38100" cy="1978800"/>
-            <a:chOff x="0" y="0"/>
-            <a:chExt cx="50800" cy="2638400"/>
-          </a:xfrm>
-        </p:grpSpPr>
-        <p:sp>
-          <p:nvSpPr>
-            <p:cNvPr name="Freeform 13" id="13"/>
-            <p:cNvSpPr/>
-            <p:nvPr/>
-          </p:nvSpPr>
-          <p:spPr>
-            <a:xfrm flipH="false" flipV="false" rot="0">
-              <a:off x="0" y="0"/>
-              <a:ext cx="50800" cy="2638425"/>
-            </a:xfrm>
-            <a:custGeom>
-              <a:avLst/>
-              <a:gdLst/>
-              <a:ahLst/>
-              <a:cxnLst/>
-              <a:rect r="r" b="b" t="t" l="l"/>
-              <a:pathLst>
-                <a:path h="2638425" w="50800">
-                  <a:moveTo>
-                    <a:pt x="50800" y="25400"/>
-                  </a:moveTo>
-                  <a:lnTo>
-                    <a:pt x="50800" y="2613025"/>
-                  </a:lnTo>
-                  <a:cubicBezTo>
-                    <a:pt x="50800" y="2626995"/>
-                    <a:pt x="39370" y="2638425"/>
-                    <a:pt x="25400" y="2638425"/>
-                  </a:cubicBezTo>
-                  <a:cubicBezTo>
-                    <a:pt x="11430" y="2638425"/>
-                    <a:pt x="0" y="2626995"/>
-                    <a:pt x="0" y="2613025"/>
-                  </a:cubicBezTo>
-                  <a:lnTo>
-                    <a:pt x="0" y="25400"/>
-                  </a:lnTo>
-                  <a:cubicBezTo>
-                    <a:pt x="0" y="11430"/>
-                    <a:pt x="11430" y="0"/>
-                    <a:pt x="25400" y="0"/>
-                  </a:cubicBezTo>
-                  <a:cubicBezTo>
-                    <a:pt x="39370" y="0"/>
-                    <a:pt x="50800" y="11430"/>
-                    <a:pt x="50800" y="25400"/>
-                  </a:cubicBezTo>
-                  <a:close/>
-                </a:path>
-              </a:pathLst>
-            </a:custGeom>
-            <a:solidFill>
-              <a:srgbClr val="000000"/>
-            </a:solidFill>
-          </p:spPr>
-        </p:sp>
-      </p:grpSp>
-      <p:sp>
-        <p:nvSpPr>
-          <p:cNvPr name="TextBox 14" id="14"/>
-          <p:cNvSpPr txBox="true"/>
-          <p:nvPr/>
-        </p:nvSpPr>
-        <p:spPr>
-          <a:xfrm rot="0">
-            <a:off x="5720344" y="6896100"/>
-            <a:ext cx="3968334" cy="608965"/>
-          </a:xfrm>
-          <a:prstGeom prst="rect">
-            <a:avLst/>
-          </a:prstGeom>
-        </p:spPr>
-        <p:txBody>
-          <a:bodyPr anchor="t" rtlCol="false" tIns="0" lIns="0" bIns="0" rIns="0">
-            <a:spAutoFit/>
-          </a:bodyPr>
-          <a:lstStyle/>
-          <a:p>
-            <a:pPr algn="l">
-              <a:lnSpc>
-                <a:spcPts val="5120"/>
-              </a:lnSpc>
-            </a:pPr>
-            <a:r>
-              <a:rPr lang="en-US" sz="3200" b="true">
-                <a:solidFill>
-                  <a:srgbClr val="000000"/>
-                </a:solidFill>
-                <a:latin typeface="Open Sauce Bold"/>
-                <a:ea typeface="Open Sauce Bold"/>
-                <a:cs typeface="Open Sauce Bold"/>
-                <a:sym typeface="Open Sauce Bold"/>
-              </a:rPr>
-              <a:t>Функционалности</a:t>
-            </a:r>
-          </a:p>
-        </p:txBody>
-      </p:sp>
-      <p:sp>
-        <p:nvSpPr>
-          <p:cNvPr name="TextBox 15" id="15"/>
-          <p:cNvSpPr txBox="true"/>
-          <p:nvPr/>
-        </p:nvSpPr>
-        <p:spPr>
-          <a:xfrm rot="0">
-            <a:off x="5720344" y="7675245"/>
-            <a:ext cx="4006434" cy="1430655"/>
-          </a:xfrm>
-          <a:prstGeom prst="rect">
-            <a:avLst/>
-          </a:prstGeom>
-        </p:spPr>
-        <p:txBody>
-          <a:bodyPr anchor="t" rtlCol="false" tIns="0" lIns="0" bIns="0" rIns="0">
-            <a:spAutoFit/>
-          </a:bodyPr>
-          <a:lstStyle/>
-          <a:p>
-            <a:pPr algn="l">
-              <a:lnSpc>
-                <a:spcPts val="3840"/>
-              </a:lnSpc>
-            </a:pPr>
-            <a:r>
-              <a:rPr lang="en-US" sz="2400">
-                <a:solidFill>
-                  <a:srgbClr val="000000"/>
-                </a:solidFill>
-                <a:latin typeface="Open Sauce"/>
-                <a:ea typeface="Open Sauce"/>
-                <a:cs typeface="Open Sauce"/>
-                <a:sym typeface="Open Sauce"/>
-              </a:rPr>
-              <a:t>Измисляне на архитектура и изчистване на функционалности</a:t>
-            </a:r>
-          </a:p>
-        </p:txBody>
-      </p:sp>
-      <p:grpSp>
-        <p:nvGrpSpPr>
-          <p:cNvPr name="Group 16" id="16"/>
-          <p:cNvGrpSpPr/>
-          <p:nvPr/>
-        </p:nvGrpSpPr>
-        <p:grpSpPr>
-          <a:xfrm rot="0">
-            <a:off x="5329819" y="5665613"/>
-            <a:ext cx="38100" cy="1978800"/>
-            <a:chOff x="0" y="0"/>
-            <a:chExt cx="50800" cy="2638400"/>
-          </a:xfrm>
-        </p:grpSpPr>
-        <p:sp>
-          <p:nvSpPr>
-            <p:cNvPr name="Freeform 17" id="17"/>
-            <p:cNvSpPr/>
-            <p:nvPr/>
-          </p:nvSpPr>
-          <p:spPr>
-            <a:xfrm flipH="false" flipV="false" rot="0">
-              <a:off x="0" y="0"/>
-              <a:ext cx="50800" cy="2638425"/>
-            </a:xfrm>
-            <a:custGeom>
-              <a:avLst/>
-              <a:gdLst/>
-              <a:ahLst/>
-              <a:cxnLst/>
-              <a:rect r="r" b="b" t="t" l="l"/>
-              <a:pathLst>
-                <a:path h="2638425" w="50800">
-                  <a:moveTo>
-                    <a:pt x="50800" y="25400"/>
-                  </a:moveTo>
-                  <a:lnTo>
-                    <a:pt x="50800" y="2613025"/>
-                  </a:lnTo>
-                  <a:cubicBezTo>
-                    <a:pt x="50800" y="2626995"/>
-                    <a:pt x="39370" y="2638425"/>
-                    <a:pt x="25400" y="2638425"/>
-                  </a:cubicBezTo>
-                  <a:cubicBezTo>
-                    <a:pt x="11430" y="2638425"/>
-                    <a:pt x="0" y="2626995"/>
-                    <a:pt x="0" y="2613025"/>
-                  </a:cubicBezTo>
-                  <a:lnTo>
-                    <a:pt x="0" y="25400"/>
-                  </a:lnTo>
-                  <a:cubicBezTo>
-                    <a:pt x="0" y="11430"/>
-                    <a:pt x="11430" y="0"/>
-                    <a:pt x="25400" y="0"/>
-                  </a:cubicBezTo>
-                  <a:cubicBezTo>
-                    <a:pt x="39370" y="0"/>
-                    <a:pt x="50800" y="11430"/>
-                    <a:pt x="50800" y="25400"/>
-                  </a:cubicBezTo>
-                  <a:close/>
-                </a:path>
-              </a:pathLst>
-            </a:custGeom>
-            <a:solidFill>
-              <a:srgbClr val="000000"/>
-            </a:solidFill>
-          </p:spPr>
-        </p:sp>
-      </p:grpSp>
-      <p:sp>
-        <p:nvSpPr>
-          <p:cNvPr name="TextBox 18" id="18"/>
-          <p:cNvSpPr txBox="true"/>
-          <p:nvPr/>
-        </p:nvSpPr>
-        <p:spPr>
-          <a:xfrm rot="0">
-            <a:off x="10079203" y="2804655"/>
-            <a:ext cx="3440954" cy="608965"/>
-          </a:xfrm>
-          <a:prstGeom prst="rect">
-            <a:avLst/>
-          </a:prstGeom>
-        </p:spPr>
-        <p:txBody>
-          <a:bodyPr anchor="t" rtlCol="false" tIns="0" lIns="0" bIns="0" rIns="0">
-            <a:spAutoFit/>
-          </a:bodyPr>
-          <a:lstStyle/>
-          <a:p>
-            <a:pPr algn="l">
-              <a:lnSpc>
-                <a:spcPts val="5120"/>
-              </a:lnSpc>
-            </a:pPr>
-            <a:r>
-              <a:rPr lang="en-US" sz="3200" b="true">
-                <a:solidFill>
-                  <a:srgbClr val="000000"/>
-                </a:solidFill>
-                <a:latin typeface="Open Sauce Bold"/>
-                <a:ea typeface="Open Sauce Bold"/>
-                <a:cs typeface="Open Sauce Bold"/>
-                <a:sym typeface="Open Sauce Bold"/>
-              </a:rPr>
-              <a:t>Разработка</a:t>
-            </a:r>
-          </a:p>
-        </p:txBody>
-      </p:sp>
-      <p:sp>
-        <p:nvSpPr>
-          <p:cNvPr name="TextBox 19" id="19"/>
-          <p:cNvSpPr txBox="true"/>
-          <p:nvPr/>
-        </p:nvSpPr>
-        <p:spPr>
-          <a:xfrm rot="0">
-            <a:off x="10079203" y="3583800"/>
-            <a:ext cx="3900887" cy="944880"/>
-          </a:xfrm>
-          <a:prstGeom prst="rect">
-            <a:avLst/>
-          </a:prstGeom>
-        </p:spPr>
-        <p:txBody>
-          <a:bodyPr anchor="t" rtlCol="false" tIns="0" lIns="0" bIns="0" rIns="0">
-            <a:spAutoFit/>
-          </a:bodyPr>
-          <a:lstStyle/>
-          <a:p>
-            <a:pPr algn="l">
-              <a:lnSpc>
-                <a:spcPts val="3840"/>
-              </a:lnSpc>
-            </a:pPr>
-            <a:r>
-              <a:rPr lang="en-US" sz="2400">
-                <a:solidFill>
-                  <a:srgbClr val="000000"/>
-                </a:solidFill>
-                <a:latin typeface="Open Sauce"/>
-                <a:ea typeface="Open Sauce"/>
-                <a:cs typeface="Open Sauce"/>
-                <a:sym typeface="Open Sauce"/>
-              </a:rPr>
-              <a:t>Разработка на желаните функционалности</a:t>
-            </a:r>
-          </a:p>
-        </p:txBody>
-      </p:sp>
-      <p:grpSp>
-        <p:nvGrpSpPr>
-          <p:cNvPr name="Group 20" id="20"/>
-          <p:cNvGrpSpPr/>
-          <p:nvPr/>
-        </p:nvGrpSpPr>
-        <p:grpSpPr>
-          <a:xfrm rot="0">
-            <a:off x="9688678" y="3766614"/>
-            <a:ext cx="38100" cy="1978800"/>
-            <a:chOff x="0" y="0"/>
-            <a:chExt cx="50800" cy="2638400"/>
-          </a:xfrm>
-        </p:grpSpPr>
-        <p:sp>
-          <p:nvSpPr>
-            <p:cNvPr name="Freeform 21" id="21"/>
-            <p:cNvSpPr/>
-            <p:nvPr/>
-          </p:nvSpPr>
-          <p:spPr>
-            <a:xfrm flipH="false" flipV="false" rot="0">
-              <a:off x="0" y="0"/>
-              <a:ext cx="50800" cy="2638425"/>
-            </a:xfrm>
-            <a:custGeom>
-              <a:avLst/>
-              <a:gdLst/>
-              <a:ahLst/>
-              <a:cxnLst/>
-              <a:rect r="r" b="b" t="t" l="l"/>
-              <a:pathLst>
-                <a:path h="2638425" w="50800">
-                  <a:moveTo>
-                    <a:pt x="50800" y="25400"/>
-                  </a:moveTo>
-                  <a:lnTo>
-                    <a:pt x="50800" y="2613025"/>
-                  </a:lnTo>
-                  <a:cubicBezTo>
-                    <a:pt x="50800" y="2626995"/>
-                    <a:pt x="39370" y="2638425"/>
-                    <a:pt x="25400" y="2638425"/>
-                  </a:cubicBezTo>
-                  <a:cubicBezTo>
-                    <a:pt x="11430" y="2638425"/>
-                    <a:pt x="0" y="2626995"/>
-                    <a:pt x="0" y="2613025"/>
-                  </a:cubicBezTo>
-                  <a:lnTo>
-                    <a:pt x="0" y="25400"/>
-                  </a:lnTo>
-                  <a:cubicBezTo>
-                    <a:pt x="0" y="11430"/>
-                    <a:pt x="11430" y="0"/>
-                    <a:pt x="25400" y="0"/>
-                  </a:cubicBezTo>
-                  <a:cubicBezTo>
-                    <a:pt x="39370" y="0"/>
-                    <a:pt x="50800" y="11430"/>
-                    <a:pt x="50800" y="25400"/>
-                  </a:cubicBezTo>
-                  <a:close/>
-                </a:path>
-              </a:pathLst>
-            </a:custGeom>
-            <a:solidFill>
-              <a:srgbClr val="000000"/>
-            </a:solidFill>
-          </p:spPr>
-        </p:sp>
-      </p:grpSp>
-      <p:sp>
-        <p:nvSpPr>
-          <p:cNvPr name="TextBox 22" id="22"/>
-          <p:cNvSpPr txBox="true"/>
-          <p:nvPr/>
-        </p:nvSpPr>
-        <p:spPr>
-          <a:xfrm rot="0">
-            <a:off x="13680653" y="6896100"/>
-            <a:ext cx="3440954" cy="608965"/>
-          </a:xfrm>
-          <a:prstGeom prst="rect">
-            <a:avLst/>
-          </a:prstGeom>
-        </p:spPr>
-        <p:txBody>
-          <a:bodyPr anchor="t" rtlCol="false" tIns="0" lIns="0" bIns="0" rIns="0">
-            <a:spAutoFit/>
-          </a:bodyPr>
-          <a:lstStyle/>
-          <a:p>
-            <a:pPr algn="l">
-              <a:lnSpc>
-                <a:spcPts val="5120"/>
-              </a:lnSpc>
-            </a:pPr>
-            <a:r>
-              <a:rPr lang="en-US" sz="3200" b="true">
-                <a:solidFill>
-                  <a:srgbClr val="000000"/>
-                </a:solidFill>
-                <a:latin typeface="Open Sauce Bold"/>
-                <a:ea typeface="Open Sauce Bold"/>
-                <a:cs typeface="Open Sauce Bold"/>
-                <a:sym typeface="Open Sauce Bold"/>
-              </a:rPr>
-              <a:t>Оформяне</a:t>
-            </a:r>
-          </a:p>
-        </p:txBody>
-      </p:sp>
-      <p:sp>
-        <p:nvSpPr>
-          <p:cNvPr name="TextBox 23" id="23"/>
-          <p:cNvSpPr txBox="true"/>
-          <p:nvPr/>
-        </p:nvSpPr>
-        <p:spPr>
-          <a:xfrm rot="0">
-            <a:off x="13680653" y="7675245"/>
-            <a:ext cx="3578647" cy="944880"/>
-          </a:xfrm>
-          <a:prstGeom prst="rect">
-            <a:avLst/>
-          </a:prstGeom>
-        </p:spPr>
-        <p:txBody>
-          <a:bodyPr anchor="t" rtlCol="false" tIns="0" lIns="0" bIns="0" rIns="0">
-            <a:spAutoFit/>
-          </a:bodyPr>
-          <a:lstStyle/>
-          <a:p>
-            <a:pPr algn="l">
-              <a:lnSpc>
-                <a:spcPts val="3840"/>
-              </a:lnSpc>
-            </a:pPr>
-            <a:r>
-              <a:rPr lang="en-US" sz="2400">
-                <a:solidFill>
-                  <a:srgbClr val="000000"/>
-                </a:solidFill>
-                <a:latin typeface="Open Sauce"/>
-                <a:ea typeface="Open Sauce"/>
-                <a:cs typeface="Open Sauce"/>
-                <a:sym typeface="Open Sauce"/>
-              </a:rPr>
-              <a:t>Quality Assurance и изчистване на бъгове</a:t>
-            </a:r>
-          </a:p>
-        </p:txBody>
-      </p:sp>
-      <p:grpSp>
-        <p:nvGrpSpPr>
-          <p:cNvPr name="Group 24" id="24"/>
-          <p:cNvGrpSpPr/>
-          <p:nvPr/>
-        </p:nvGrpSpPr>
-        <p:grpSpPr>
-          <a:xfrm rot="0">
-            <a:off x="13290128" y="5665613"/>
-            <a:ext cx="38100" cy="1978800"/>
-            <a:chOff x="0" y="0"/>
-            <a:chExt cx="50800" cy="2638400"/>
-          </a:xfrm>
-        </p:grpSpPr>
-        <p:sp>
-          <p:nvSpPr>
-            <p:cNvPr name="Freeform 25" id="25"/>
-            <p:cNvSpPr/>
-            <p:nvPr/>
-          </p:nvSpPr>
-          <p:spPr>
-            <a:xfrm flipH="false" flipV="false" rot="0">
-              <a:off x="0" y="0"/>
-              <a:ext cx="50800" cy="2638425"/>
-            </a:xfrm>
-            <a:custGeom>
-              <a:avLst/>
-              <a:gdLst/>
-              <a:ahLst/>
-              <a:cxnLst/>
-              <a:rect r="r" b="b" t="t" l="l"/>
-              <a:pathLst>
-                <a:path h="2638425" w="50800">
-                  <a:moveTo>
-                    <a:pt x="50800" y="25400"/>
-                  </a:moveTo>
-                  <a:lnTo>
-                    <a:pt x="50800" y="2613025"/>
-                  </a:lnTo>
-                  <a:cubicBezTo>
-                    <a:pt x="50800" y="2626995"/>
-                    <a:pt x="39370" y="2638425"/>
-                    <a:pt x="25400" y="2638425"/>
-                  </a:cubicBezTo>
-                  <a:cubicBezTo>
-                    <a:pt x="11430" y="2638425"/>
-                    <a:pt x="0" y="2626995"/>
-                    <a:pt x="0" y="2613025"/>
-                  </a:cubicBezTo>
-                  <a:lnTo>
-                    <a:pt x="0" y="25400"/>
-                  </a:lnTo>
-                  <a:cubicBezTo>
-                    <a:pt x="0" y="11430"/>
-                    <a:pt x="11430" y="0"/>
-                    <a:pt x="25400" y="0"/>
-                  </a:cubicBezTo>
-                  <a:cubicBezTo>
-                    <a:pt x="39370" y="0"/>
-                    <a:pt x="50800" y="11430"/>
-                    <a:pt x="50800" y="25400"/>
-                  </a:cubicBezTo>
-                  <a:close/>
-                </a:path>
-              </a:pathLst>
-            </a:custGeom>
-            <a:solidFill>
-              <a:srgbClr val="000000"/>
-            </a:solidFill>
-          </p:spPr>
-        </p:sp>
-      </p:grpSp>
-    </p:spTree>
-  </p:cSld>
-  <p:clrMapOvr>
-    <a:masterClrMapping/>
-  </p:clrMapOvr>
-</p:sld>
-</file>
-
-<file path=ppt/slides/slide8.xml><?xml version="1.0" encoding="utf-8"?>
 <p:sld xmlns:p="http://schemas.openxmlformats.org/presentationml/2006/main" xmlns:a="http://schemas.openxmlformats.org/drawingml/2006/main" xmlns:r="http://schemas.openxmlformats.org/officeDocument/2006/relationships">
   <p:cSld>
     <p:spTree>
@@ -9425,6 +8072,178 @@
       <p:sp>
         <p:nvSpPr>
           <p:cNvPr name="TextBox 6" id="6"/>
+          <p:cNvSpPr txBox="true"/>
+          <p:nvPr/>
+        </p:nvSpPr>
+        <p:spPr>
+          <a:xfrm rot="0">
+            <a:off x="13671128" y="9103995"/>
+            <a:ext cx="3450479" cy="311782"/>
+          </a:xfrm>
+          <a:prstGeom prst="rect">
+            <a:avLst/>
+          </a:prstGeom>
+        </p:spPr>
+        <p:txBody>
+          <a:bodyPr anchor="t" rtlCol="false" tIns="0" lIns="0" bIns="0" rIns="0">
+            <a:spAutoFit/>
+          </a:bodyPr>
+          <a:lstStyle/>
+          <a:p>
+            <a:pPr algn="r">
+              <a:lnSpc>
+                <a:spcPts val="2238"/>
+              </a:lnSpc>
+            </a:pPr>
+            <a:r>
+              <a:rPr lang="en-US" sz="1599" spc="159">
+                <a:solidFill>
+                  <a:srgbClr val="000000">
+                    <a:alpha val="49412"/>
+                  </a:srgbClr>
+                </a:solidFill>
+                <a:latin typeface="Open Sauce"/>
+                <a:ea typeface="Open Sauce"/>
+                <a:cs typeface="Open Sauce"/>
+                <a:sym typeface="Open Sauce"/>
+              </a:rPr>
+              <a:t>9</a:t>
+            </a:r>
+          </a:p>
+        </p:txBody>
+      </p:sp>
+    </p:spTree>
+  </p:cSld>
+  <p:clrMapOvr>
+    <a:masterClrMapping/>
+  </p:clrMapOvr>
+</p:sld>
+</file>
+
+<file path=ppt/slides/slide8.xml><?xml version="1.0" encoding="utf-8"?>
+<p:sld xmlns:p="http://schemas.openxmlformats.org/presentationml/2006/main" xmlns:a="http://schemas.openxmlformats.org/drawingml/2006/main" xmlns:r="http://schemas.openxmlformats.org/officeDocument/2006/relationships">
+  <p:cSld>
+    <p:spTree>
+      <p:nvGrpSpPr>
+        <p:cNvPr id="1" name=""/>
+        <p:cNvGrpSpPr/>
+        <p:nvPr/>
+      </p:nvGrpSpPr>
+      <p:grpSpPr>
+        <a:xfrm>
+          <a:off x="0" y="0"/>
+          <a:ext cx="0" cy="0"/>
+          <a:chOff x="0" y="0"/>
+          <a:chExt cx="0" cy="0"/>
+        </a:xfrm>
+      </p:grpSpPr>
+      <p:grpSp>
+        <p:nvGrpSpPr>
+          <p:cNvPr name="Group 2" id="2"/>
+          <p:cNvGrpSpPr/>
+          <p:nvPr/>
+        </p:nvGrpSpPr>
+        <p:grpSpPr>
+          <a:xfrm rot="0">
+            <a:off x="0" y="0"/>
+            <a:ext cx="18288000" cy="10287000"/>
+            <a:chOff x="0" y="0"/>
+            <a:chExt cx="24384000" cy="13716000"/>
+          </a:xfrm>
+        </p:grpSpPr>
+        <p:sp>
+          <p:nvSpPr>
+            <p:cNvPr name="Freeform 3" id="3"/>
+            <p:cNvSpPr/>
+            <p:nvPr/>
+          </p:nvSpPr>
+          <p:spPr>
+            <a:xfrm flipH="false" flipV="false" rot="0">
+              <a:off x="0" y="0"/>
+              <a:ext cx="24384000" cy="13716000"/>
+            </a:xfrm>
+            <a:custGeom>
+              <a:avLst/>
+              <a:gdLst/>
+              <a:ahLst/>
+              <a:cxnLst/>
+              <a:rect r="r" b="b" t="t" l="l"/>
+              <a:pathLst>
+                <a:path h="13716000" w="24384000">
+                  <a:moveTo>
+                    <a:pt x="0" y="0"/>
+                  </a:moveTo>
+                  <a:lnTo>
+                    <a:pt x="24384000" y="0"/>
+                  </a:lnTo>
+                  <a:lnTo>
+                    <a:pt x="24384000" y="13716000"/>
+                  </a:lnTo>
+                  <a:lnTo>
+                    <a:pt x="0" y="13716000"/>
+                  </a:lnTo>
+                  <a:lnTo>
+                    <a:pt x="0" y="0"/>
+                  </a:lnTo>
+                  <a:close/>
+                </a:path>
+              </a:pathLst>
+            </a:custGeom>
+            <a:blipFill>
+              <a:blip r:embed="rId2">
+                <a:alphaModFix amt="50000"/>
+              </a:blip>
+              <a:stretch>
+                <a:fillRect l="-1632" t="0" r="-1632" b="0"/>
+              </a:stretch>
+            </a:blipFill>
+          </p:spPr>
+        </p:sp>
+      </p:grpSp>
+      <p:sp>
+        <p:nvSpPr>
+          <p:cNvPr name="TextBox 4" id="4"/>
+          <p:cNvSpPr txBox="true"/>
+          <p:nvPr/>
+        </p:nvSpPr>
+        <p:spPr>
+          <a:xfrm rot="0">
+            <a:off x="7078683" y="3746124"/>
+            <a:ext cx="3822792" cy="1988779"/>
+          </a:xfrm>
+          <a:prstGeom prst="rect">
+            <a:avLst/>
+          </a:prstGeom>
+        </p:spPr>
+        <p:txBody>
+          <a:bodyPr anchor="t" rtlCol="false" tIns="0" lIns="0" bIns="0" rIns="0">
+            <a:spAutoFit/>
+          </a:bodyPr>
+          <a:lstStyle/>
+          <a:p>
+            <a:pPr algn="l">
+              <a:lnSpc>
+                <a:spcPts val="16377"/>
+              </a:lnSpc>
+            </a:pPr>
+            <a:r>
+              <a:rPr lang="en-US" sz="11697">
+                <a:solidFill>
+                  <a:srgbClr val="004AAD"/>
+                </a:solidFill>
+                <a:latin typeface="DM Serif Display"/>
+                <a:ea typeface="DM Serif Display"/>
+                <a:cs typeface="DM Serif Display"/>
+                <a:sym typeface="DM Serif Display"/>
+              </a:rPr>
+              <a:t>Demo</a:t>
+            </a:r>
+          </a:p>
+        </p:txBody>
+      </p:sp>
+      <p:sp>
+        <p:nvSpPr>
+          <p:cNvPr name="TextBox 5" id="5"/>
           <p:cNvSpPr txBox="true"/>
           <p:nvPr/>
         </p:nvSpPr>
@@ -9547,77 +8366,22 @@
                 <a:alphaModFix amt="50000"/>
               </a:blip>
               <a:stretch>
-                <a:fillRect l="0" t="-27" r="0" b="-27"/>
+                <a:fillRect l="0" t="-12" r="0" b="-12"/>
               </a:stretch>
             </a:blipFill>
           </p:spPr>
         </p:sp>
       </p:grpSp>
-      <p:grpSp>
-        <p:nvGrpSpPr>
-          <p:cNvPr name="Group 4" id="4"/>
-          <p:cNvGrpSpPr/>
-          <p:nvPr/>
-        </p:nvGrpSpPr>
-        <p:grpSpPr>
-          <a:xfrm rot="0">
-            <a:off x="1128303" y="990600"/>
-            <a:ext cx="1569615" cy="76200"/>
-            <a:chOff x="0" y="0"/>
-            <a:chExt cx="2092820" cy="101600"/>
-          </a:xfrm>
-        </p:grpSpPr>
-        <p:sp>
-          <p:nvSpPr>
-            <p:cNvPr name="Freeform 5" id="5"/>
-            <p:cNvSpPr/>
-            <p:nvPr/>
-          </p:nvSpPr>
-          <p:spPr>
-            <a:xfrm flipH="false" flipV="false" rot="0">
-              <a:off x="50800" y="0"/>
-              <a:ext cx="1991233" cy="101600"/>
-            </a:xfrm>
-            <a:custGeom>
-              <a:avLst/>
-              <a:gdLst/>
-              <a:ahLst/>
-              <a:cxnLst/>
-              <a:rect r="r" b="b" t="t" l="l"/>
-              <a:pathLst>
-                <a:path h="101600" w="1991233">
-                  <a:moveTo>
-                    <a:pt x="0" y="0"/>
-                  </a:moveTo>
-                  <a:lnTo>
-                    <a:pt x="1991233" y="0"/>
-                  </a:lnTo>
-                  <a:lnTo>
-                    <a:pt x="1991233" y="101600"/>
-                  </a:lnTo>
-                  <a:lnTo>
-                    <a:pt x="0" y="101600"/>
-                  </a:lnTo>
-                  <a:close/>
-                </a:path>
-              </a:pathLst>
-            </a:custGeom>
-            <a:solidFill>
-              <a:srgbClr val="000000"/>
-            </a:solidFill>
-          </p:spPr>
-        </p:sp>
-      </p:grpSp>
-      <p:sp>
-        <p:nvSpPr>
-          <p:cNvPr name="TextBox 6" id="6"/>
+      <p:sp>
+        <p:nvSpPr>
+          <p:cNvPr name="TextBox 4" id="4"/>
           <p:cNvSpPr txBox="true"/>
           <p:nvPr/>
         </p:nvSpPr>
         <p:spPr>
           <a:xfrm rot="0">
-            <a:off x="1166403" y="1119521"/>
-            <a:ext cx="3822792" cy="1199512"/>
+            <a:off x="1732102" y="2181729"/>
+            <a:ext cx="14823796" cy="4784718"/>
           </a:xfrm>
           <a:prstGeom prst="rect">
             <a:avLst/>
@@ -9629,36 +8393,36 @@
           </a:bodyPr>
           <a:lstStyle/>
           <a:p>
-            <a:pPr algn="l">
+            <a:pPr algn="ctr">
               <a:lnSpc>
-                <a:spcPts val="8958"/>
+                <a:spcPts val="18200"/>
               </a:lnSpc>
             </a:pPr>
             <a:r>
-              <a:rPr lang="en-US" sz="6398">
+              <a:rPr lang="en-US" sz="13000" b="true">
                 <a:solidFill>
-                  <a:srgbClr val="000000"/>
+                  <a:srgbClr val="004AAD"/>
                 </a:solidFill>
-                <a:latin typeface="DM Serif Display"/>
-                <a:ea typeface="DM Serif Display"/>
-                <a:cs typeface="DM Serif Display"/>
-                <a:sym typeface="DM Serif Display"/>
+                <a:latin typeface="Times New Roman MT Bold"/>
+                <a:ea typeface="Times New Roman MT Bold"/>
+                <a:cs typeface="Times New Roman MT Bold"/>
+                <a:sym typeface="Times New Roman MT Bold"/>
               </a:rPr>
-              <a:t>Demo</a:t>
-            </a:r>
-          </a:p>
-        </p:txBody>
-      </p:sp>
-      <p:sp>
-        <p:nvSpPr>
-          <p:cNvPr name="TextBox 7" id="7"/>
+              <a:t>Благодарим ви за вниманието</a:t>
+            </a:r>
+          </a:p>
+        </p:txBody>
+      </p:sp>
+      <p:sp>
+        <p:nvSpPr>
+          <p:cNvPr name="TextBox 5" id="5"/>
           <p:cNvSpPr txBox="true"/>
           <p:nvPr/>
         </p:nvSpPr>
         <p:spPr>
           <a:xfrm rot="0">
-            <a:off x="13671128" y="9103995"/>
-            <a:ext cx="3450479" cy="311782"/>
+            <a:off x="1732102" y="6928347"/>
+            <a:ext cx="14823796" cy="273660"/>
           </a:xfrm>
           <a:prstGeom prst="rect">
             <a:avLst/>
@@ -9670,24 +8434,25 @@
           </a:bodyPr>
           <a:lstStyle/>
           <a:p>
-            <a:pPr algn="r">
+            <a:pPr algn="ctr">
               <a:lnSpc>
                 <a:spcPts val="2238"/>
               </a:lnSpc>
+              <a:spcBef>
+                <a:spcPct val="0"/>
+              </a:spcBef>
             </a:pPr>
             <a:r>
-              <a:rPr lang="en-US" sz="1599" spc="159">
+              <a:rPr lang="en-US" sz="1599" spc="158">
                 <a:solidFill>
-                  <a:srgbClr val="000000">
-                    <a:alpha val="49412"/>
-                  </a:srgbClr>
+                  <a:srgbClr val="004AAD"/>
                 </a:solidFill>
                 <a:latin typeface="Open Sauce"/>
                 <a:ea typeface="Open Sauce"/>
                 <a:cs typeface="Open Sauce"/>
                 <a:sym typeface="Open Sauce"/>
               </a:rPr>
-              <a:t>9</a:t>
+              <a:t>t</a:t>
             </a:r>
           </a:p>
         </p:txBody>
